--- a/examples/ppt/transitions/transitions-timing.pptx
+++ b/examples/ppt/transitions/transitions-timing.pptx
@@ -5,15 +5,15 @@
     <p:sldMasterId xmlns:r="http://schemas.openxmlformats.org/officeDocument/2006/relationships" id="2147483648" r:id="rId1"/>
   </p:sldMasterIdLst>
   <p:sldIdLst>
-    <p:sldId id="256" r:id="R4375513bf60440f6"/>
-    <p:sldId id="257" r:id="R18b23d94867940c7"/>
-    <p:sldId id="258" r:id="R458c5d0bd87940f7"/>
-    <p:sldId id="259" r:id="R24ec9e3559324d65"/>
-    <p:sldId id="260" r:id="R0d08421419744847"/>
-    <p:sldId id="261" r:id="Rcd0a505f66264dd7"/>
-    <p:sldId id="262" r:id="R6f2019e658d940bd"/>
-    <p:sldId id="263" r:id="Rcffd48c43eaf482e"/>
-    <p:sldId id="264" r:id="R138921b75d3f4581"/>
+    <p:sldId id="256" r:id="R86f9e54a77324f5f"/>
+    <p:sldId id="257" r:id="Ra9e7c4f15c3c4904"/>
+    <p:sldId id="258" r:id="Rd4a775a2690f4990"/>
+    <p:sldId id="259" r:id="R112d4c49e6034a84"/>
+    <p:sldId id="260" r:id="Rc922c18646684a83"/>
+    <p:sldId id="261" r:id="Rc945bd9326764422"/>
+    <p:sldId id="262" r:id="Rd5e33db7353d4010"/>
+    <p:sldId id="263" r:id="R65cfb3b679e94ff3"/>
+    <p:sldId id="264" r:id="R08ec5805144041c1"/>
   </p:sldIdLst>
   <p:sldSz cx="12192000" cy="6858000"/>
   <p:notesSz cx="6858000" cy="9144000"/>
@@ -288,7 +288,7 @@
 </file>
 
 <file path=ppt/slideMasters/slideMaster1.xml><?xml version="1.0" encoding="utf-8"?>
-<p:sldMaster xmlns:p="http://schemas.openxmlformats.org/presentationml/2006/main">
+<p:sldMaster xmlns:r="http://schemas.openxmlformats.org/officeDocument/2006/relationships" xmlns:p="http://schemas.openxmlformats.org/presentationml/2006/main">
   <p:cSld>
     <p:spTree>
       <p:nvGrpSpPr>
@@ -322,7 +322,7 @@
       <p:grpSpPr/>
       <p:sp>
         <p:nvSpPr>
-          <p:cNvPr id="10000" name="TextBox 1"/>
+          <p:cNvPr id="100000" name="TextBox 1"/>
           <p:cNvSpPr/>
           <p:nvPr/>
         </p:nvSpPr>
@@ -341,17 +341,12 @@
         <p:txBody>
           <a:bodyPr xmlns:a="http://schemas.openxmlformats.org/drawingml/2006/main"/>
           <a:lstStyle xmlns:a="http://schemas.openxmlformats.org/drawingml/2006/main"/>
-          <a:p xmlns:a="http://schemas.openxmlformats.org/drawingml/2006/main">
-            <a:r>
-              <a:rPr lang="en-US"/>
-              <a:t/>
-            </a:r>
-          </a:p>
-        </p:txBody>
-      </p:sp>
-      <p:sp>
-        <p:nvSpPr>
-          <p:cNvPr id="10001" name="TextBox 2"/>
+          <a:p xmlns:a="http://schemas.openxmlformats.org/drawingml/2006/main"/>
+        </p:txBody>
+      </p:sp>
+      <p:sp>
+        <p:nvSpPr>
+          <p:cNvPr id="100001" name="TextBox 2"/>
           <p:cNvSpPr txBox="1"/>
           <p:nvPr/>
         </p:nvSpPr>
@@ -397,7 +392,7 @@
       <p:grpSpPr/>
       <p:sp>
         <p:nvSpPr>
-          <p:cNvPr id="10002" name="TextBox 1"/>
+          <p:cNvPr id="100002" name="TextBox 1"/>
           <p:cNvSpPr/>
           <p:nvPr/>
         </p:nvSpPr>
@@ -416,17 +411,12 @@
         <p:txBody>
           <a:bodyPr xmlns:a="http://schemas.openxmlformats.org/drawingml/2006/main"/>
           <a:lstStyle xmlns:a="http://schemas.openxmlformats.org/drawingml/2006/main"/>
-          <a:p xmlns:a="http://schemas.openxmlformats.org/drawingml/2006/main">
-            <a:r>
-              <a:rPr lang="en-US"/>
-              <a:t/>
-            </a:r>
-          </a:p>
-        </p:txBody>
-      </p:sp>
-      <p:sp>
-        <p:nvSpPr>
-          <p:cNvPr id="10003" name="TextBox 2"/>
+          <a:p xmlns:a="http://schemas.openxmlformats.org/drawingml/2006/main"/>
+        </p:txBody>
+      </p:sp>
+      <p:sp>
+        <p:nvSpPr>
+          <p:cNvPr id="100003" name="TextBox 2"/>
           <p:cNvSpPr txBox="1"/>
           <p:nvPr/>
         </p:nvSpPr>
@@ -475,7 +465,7 @@
       <p:grpSpPr/>
       <p:sp>
         <p:nvSpPr>
-          <p:cNvPr id="10004" name="TextBox 1"/>
+          <p:cNvPr id="100004" name="TextBox 1"/>
           <p:cNvSpPr/>
           <p:nvPr/>
         </p:nvSpPr>
@@ -494,17 +484,12 @@
         <p:txBody>
           <a:bodyPr xmlns:a="http://schemas.openxmlformats.org/drawingml/2006/main"/>
           <a:lstStyle xmlns:a="http://schemas.openxmlformats.org/drawingml/2006/main"/>
-          <a:p xmlns:a="http://schemas.openxmlformats.org/drawingml/2006/main">
-            <a:r>
-              <a:rPr lang="en-US"/>
-              <a:t/>
-            </a:r>
-          </a:p>
-        </p:txBody>
-      </p:sp>
-      <p:sp>
-        <p:nvSpPr>
-          <p:cNvPr id="10005" name="TextBox 2"/>
+          <a:p xmlns:a="http://schemas.openxmlformats.org/drawingml/2006/main"/>
+        </p:txBody>
+      </p:sp>
+      <p:sp>
+        <p:nvSpPr>
+          <p:cNvPr id="100005" name="TextBox 2"/>
           <p:cNvSpPr txBox="1"/>
           <p:nvPr/>
         </p:nvSpPr>
@@ -553,7 +538,7 @@
       <p:grpSpPr/>
       <p:sp>
         <p:nvSpPr>
-          <p:cNvPr id="10006" name="TextBox 1"/>
+          <p:cNvPr id="100006" name="TextBox 1"/>
           <p:cNvSpPr/>
           <p:nvPr/>
         </p:nvSpPr>
@@ -572,17 +557,12 @@
         <p:txBody>
           <a:bodyPr xmlns:a="http://schemas.openxmlformats.org/drawingml/2006/main"/>
           <a:lstStyle xmlns:a="http://schemas.openxmlformats.org/drawingml/2006/main"/>
-          <a:p xmlns:a="http://schemas.openxmlformats.org/drawingml/2006/main">
-            <a:r>
-              <a:rPr lang="en-US"/>
-              <a:t/>
-            </a:r>
-          </a:p>
-        </p:txBody>
-      </p:sp>
-      <p:sp>
-        <p:nvSpPr>
-          <p:cNvPr id="10007" name="TextBox 2"/>
+          <a:p xmlns:a="http://schemas.openxmlformats.org/drawingml/2006/main"/>
+        </p:txBody>
+      </p:sp>
+      <p:sp>
+        <p:nvSpPr>
+          <p:cNvPr id="100007" name="TextBox 2"/>
           <p:cNvSpPr txBox="1"/>
           <p:nvPr/>
         </p:nvSpPr>
@@ -631,7 +611,7 @@
       <p:grpSpPr/>
       <p:sp>
         <p:nvSpPr>
-          <p:cNvPr id="10008" name="TextBox 1"/>
+          <p:cNvPr id="100008" name="TextBox 1"/>
           <p:cNvSpPr/>
           <p:nvPr/>
         </p:nvSpPr>
@@ -650,17 +630,12 @@
         <p:txBody>
           <a:bodyPr xmlns:a="http://schemas.openxmlformats.org/drawingml/2006/main"/>
           <a:lstStyle xmlns:a="http://schemas.openxmlformats.org/drawingml/2006/main"/>
-          <a:p xmlns:a="http://schemas.openxmlformats.org/drawingml/2006/main">
-            <a:r>
-              <a:rPr lang="en-US"/>
-              <a:t/>
-            </a:r>
-          </a:p>
-        </p:txBody>
-      </p:sp>
-      <p:sp>
-        <p:nvSpPr>
-          <p:cNvPr id="10009" name="TextBox 2"/>
+          <a:p xmlns:a="http://schemas.openxmlformats.org/drawingml/2006/main"/>
+        </p:txBody>
+      </p:sp>
+      <p:sp>
+        <p:nvSpPr>
+          <p:cNvPr id="100009" name="TextBox 2"/>
           <p:cNvSpPr txBox="1"/>
           <p:nvPr/>
         </p:nvSpPr>
@@ -709,7 +684,7 @@
       <p:grpSpPr/>
       <p:sp>
         <p:nvSpPr>
-          <p:cNvPr id="10010" name="TextBox 1"/>
+          <p:cNvPr id="100010" name="TextBox 1"/>
           <p:cNvSpPr/>
           <p:nvPr/>
         </p:nvSpPr>
@@ -728,17 +703,12 @@
         <p:txBody>
           <a:bodyPr xmlns:a="http://schemas.openxmlformats.org/drawingml/2006/main"/>
           <a:lstStyle xmlns:a="http://schemas.openxmlformats.org/drawingml/2006/main"/>
-          <a:p xmlns:a="http://schemas.openxmlformats.org/drawingml/2006/main">
-            <a:r>
-              <a:rPr lang="en-US"/>
-              <a:t/>
-            </a:r>
-          </a:p>
-        </p:txBody>
-      </p:sp>
-      <p:sp>
-        <p:nvSpPr>
-          <p:cNvPr id="10011" name="TextBox 2"/>
+          <a:p xmlns:a="http://schemas.openxmlformats.org/drawingml/2006/main"/>
+        </p:txBody>
+      </p:sp>
+      <p:sp>
+        <p:nvSpPr>
+          <p:cNvPr id="100011" name="TextBox 2"/>
           <p:cNvSpPr txBox="1"/>
           <p:nvPr/>
         </p:nvSpPr>
@@ -787,7 +757,7 @@
       <p:grpSpPr/>
       <p:sp>
         <p:nvSpPr>
-          <p:cNvPr id="10012" name="TextBox 1"/>
+          <p:cNvPr id="100012" name="TextBox 1"/>
           <p:cNvSpPr/>
           <p:nvPr/>
         </p:nvSpPr>
@@ -806,17 +776,12 @@
         <p:txBody>
           <a:bodyPr xmlns:a="http://schemas.openxmlformats.org/drawingml/2006/main"/>
           <a:lstStyle xmlns:a="http://schemas.openxmlformats.org/drawingml/2006/main"/>
-          <a:p xmlns:a="http://schemas.openxmlformats.org/drawingml/2006/main">
-            <a:r>
-              <a:rPr lang="en-US"/>
-              <a:t/>
-            </a:r>
-          </a:p>
-        </p:txBody>
-      </p:sp>
-      <p:sp>
-        <p:nvSpPr>
-          <p:cNvPr id="10013" name="TextBox 2"/>
+          <a:p xmlns:a="http://schemas.openxmlformats.org/drawingml/2006/main"/>
+        </p:txBody>
+      </p:sp>
+      <p:sp>
+        <p:nvSpPr>
+          <p:cNvPr id="100013" name="TextBox 2"/>
           <p:cNvSpPr txBox="1"/>
           <p:nvPr/>
         </p:nvSpPr>
@@ -865,7 +830,7 @@
       <p:grpSpPr/>
       <p:sp>
         <p:nvSpPr>
-          <p:cNvPr id="10014" name="TextBox 1"/>
+          <p:cNvPr id="100014" name="TextBox 1"/>
           <p:cNvSpPr/>
           <p:nvPr/>
         </p:nvSpPr>
@@ -884,17 +849,12 @@
         <p:txBody>
           <a:bodyPr xmlns:a="http://schemas.openxmlformats.org/drawingml/2006/main"/>
           <a:lstStyle xmlns:a="http://schemas.openxmlformats.org/drawingml/2006/main"/>
-          <a:p xmlns:a="http://schemas.openxmlformats.org/drawingml/2006/main">
-            <a:r>
-              <a:rPr lang="en-US"/>
-              <a:t/>
-            </a:r>
-          </a:p>
-        </p:txBody>
-      </p:sp>
-      <p:sp>
-        <p:nvSpPr>
-          <p:cNvPr id="10015" name="TextBox 2"/>
+          <a:p xmlns:a="http://schemas.openxmlformats.org/drawingml/2006/main"/>
+        </p:txBody>
+      </p:sp>
+      <p:sp>
+        <p:nvSpPr>
+          <p:cNvPr id="100015" name="TextBox 2"/>
           <p:cNvSpPr txBox="1"/>
           <p:nvPr/>
         </p:nvSpPr>
@@ -943,7 +903,7 @@
       <p:grpSpPr/>
       <p:sp>
         <p:nvSpPr>
-          <p:cNvPr id="10016" name="TextBox 1"/>
+          <p:cNvPr id="100016" name="TextBox 1"/>
           <p:cNvSpPr/>
           <p:nvPr/>
         </p:nvSpPr>
@@ -962,17 +922,12 @@
         <p:txBody>
           <a:bodyPr xmlns:a="http://schemas.openxmlformats.org/drawingml/2006/main"/>
           <a:lstStyle xmlns:a="http://schemas.openxmlformats.org/drawingml/2006/main"/>
-          <a:p xmlns:a="http://schemas.openxmlformats.org/drawingml/2006/main">
-            <a:r>
-              <a:rPr lang="en-US"/>
-              <a:t/>
-            </a:r>
-          </a:p>
-        </p:txBody>
-      </p:sp>
-      <p:sp>
-        <p:nvSpPr>
-          <p:cNvPr id="10017" name="TextBox 2"/>
+          <a:p xmlns:a="http://schemas.openxmlformats.org/drawingml/2006/main"/>
+        </p:txBody>
+      </p:sp>
+      <p:sp>
+        <p:nvSpPr>
+          <p:cNvPr id="100017" name="TextBox 2"/>
           <p:cNvSpPr txBox="1"/>
           <p:nvPr/>
         </p:nvSpPr>
